--- a/atolye_icerik/sunumlar/en/04_track_a_unity_cli_lab.pptx
+++ b/atolye_icerik/sunumlar/en/04_track_a_unity_cli_lab.pptx
@@ -1709,7 +1709,7 @@
                 <a:ea typeface="Arial" pitchFamily="34" charset="-122"/>
                 <a:cs typeface="Arial" pitchFamily="34" charset="-120"/>
               </a:rPr>
-              <a:t>TRACK A · 13:30 – 16:45 · ENGINEERING + DEVOPS</a:t>
+              <a:t>TRACK A · 13:30 – 15:00 · ENGINEERING + DEVOPS</a:t>
             </a:r>
             <a:endParaRPr lang="en-US" sz="1300" dirty="0"/>
           </a:p>
@@ -2481,7 +2481,7 @@
                 <a:ea typeface="Arial" pitchFamily="34" charset="-122"/>
                 <a:cs typeface="Arial" pitchFamily="34" charset="-120"/>
               </a:rPr>
-              <a:t>One bug→fix loop with proof + your workshop_validate command + the iOS build report. Write your T3 observation into the metrics template.</a:t>
+              <a:t>One bug→fix loop with proof + your workshop_validate command; the iOS build report comes from the demo. Write your T3 observation into the metrics template.</a:t>
             </a:r>
             <a:endParaRPr lang="en-US" sz="1250" dirty="0"/>
           </a:p>
@@ -2748,7 +2748,7 @@
                 <a:ea typeface="Arial" pitchFamily="34" charset="-122"/>
                 <a:cs typeface="Arial" pitchFamily="34" charset="-120"/>
               </a:rPr>
-              <a:t>Each exercise: 5 min instructor demo + 5–10 min your turn + verification from the terminal.</a:t>
+              <a:t>The compressed flow: Ex01, Ex02, Ex06 and Ex07 hands-on; Ex03–Ex05 and Ex09 as fast instructor demos; Ex08 briefed for after the workshop.</a:t>
             </a:r>
             <a:endParaRPr lang="en-US" sz="1300" dirty="0"/>
           </a:p>
@@ -5793,7 +5793,7 @@
                 <a:ea typeface="Arial" pitchFamily="34" charset="-122"/>
                 <a:cs typeface="Arial" pitchFamily="34" charset="-120"/>
               </a:rPr>
-              <a:t>Timing: 15 min environment check + 9 × 15 min exercises + 15 min break ≈ 180 minutes.</a:t>
+              <a:t>Timing: 10 min environment check + 4 hands-on core exercises + demos ≈ 90 minutes.</a:t>
             </a:r>
             <a:endParaRPr lang="en-US" sz="1200" dirty="0"/>
           </a:p>
@@ -6552,7 +6552,7 @@
                 <a:ea typeface="Arial" pitchFamily="34" charset="-122"/>
                 <a:cs typeface="Arial" pitchFamily="34" charset="-120"/>
               </a:rPr>
-              <a:t>BLOCK 1 · 13:45 – 14:30</a:t>
+              <a:t>BLOCK 1 · 13:40 – 14:15</a:t>
             </a:r>
             <a:endParaRPr lang="en-US" sz="1100" dirty="0"/>
           </a:p>
@@ -7011,7 +7011,7 @@
                 <a:ea typeface="Arial" pitchFamily="34" charset="-122"/>
                 <a:cs typeface="Arial" pitchFamily="34" charset="-120"/>
               </a:rPr>
-              <a:t>You have the agent build the coin prefab and the ring of 8, then count the remaining coins from the terminal with eval — the core muscle of bug hunting.</a:t>
+              <a:t>Demo: the coin prefab and the ring of 8; the remaining coins are counted from the terminal with eval — the core muscle of bug hunting.</a:t>
             </a:r>
             <a:endParaRPr lang="en-US" sz="1200" dirty="0"/>
           </a:p>
@@ -7121,7 +7121,7 @@
                 <a:ea typeface="Arial" pitchFamily="34" charset="-122"/>
                 <a:cs typeface="Arial" pitchFamily="34" charset="-120"/>
               </a:rPr>
-              <a:t>BLOCK 2 · 14:30 – 15:00</a:t>
+              <a:t>DEMO · 14:15 – 14:25</a:t>
             </a:r>
             <a:endParaRPr lang="en-US" sz="1100" dirty="0"/>
           </a:p>
@@ -7501,7 +7501,7 @@
                 <a:ea typeface="Arial" pitchFamily="34" charset="-122"/>
                 <a:cs typeface="Arial" pitchFamily="34" charset="-120"/>
               </a:rPr>
-              <a:t>15:00 – 15:15 break — afterwards the scenes open with a QA report.</a:t>
+              <a:t>After the demo the scene opens with a QA report — Ex06 is in your hands.</a:t>
             </a:r>
             <a:endParaRPr lang="en-US" sz="1200" dirty="0"/>
           </a:p>
@@ -7611,7 +7611,7 @@
                 <a:ea typeface="Arial" pitchFamily="34" charset="-122"/>
                 <a:cs typeface="Arial" pitchFamily="34" charset="-120"/>
               </a:rPr>
-              <a:t>EX06 · 15:15 – 15:30</a:t>
+              <a:t>EX06 · 14:25 – 14:45</a:t>
             </a:r>
             <a:endParaRPr lang="en-US" sz="1100" dirty="0"/>
           </a:p>
@@ -8129,7 +8129,7 @@
                 <a:ea typeface="Arial" pitchFamily="34" charset="-122"/>
                 <a:cs typeface="Arial" pitchFamily="34" charset="-120"/>
               </a:rPr>
-              <a:t>EX07 – EX08 · 15:30 – 16:00</a:t>
+              <a:t>EX07 – EX08 · 14:45 – 14:55</a:t>
             </a:r>
             <a:endParaRPr lang="en-US" sz="1100" dirty="0"/>
           </a:p>
@@ -8468,7 +8468,7 @@
                 <a:ea typeface="Arial" pitchFamily="34" charset="-122"/>
                 <a:cs typeface="Arial" pitchFamily="34" charset="-120"/>
               </a:rPr>
-              <a:t>Acceptance criteria only: a magnet power-up, 5 seconds, radius ~4. You write the prompt, you challenge the plan, you demand the proof. Your validator must stay green.</a:t>
+              <a:t>Today just the briefing: you get the acceptance criteria (magnet, 5 s, radius ~4) — fly this one solo after the workshop. Your validator must stay green.</a:t>
             </a:r>
             <a:endParaRPr lang="en-US" sz="1150" dirty="0"/>
           </a:p>
@@ -8578,7 +8578,7 @@
                 <a:ea typeface="Arial" pitchFamily="34" charset="-122"/>
                 <a:cs typeface="Arial" pitchFamily="34" charset="-120"/>
               </a:rPr>
-              <a:t>EX09 · 16:00 – 16:30</a:t>
+              <a:t>EX09 · DEMO · 14:55 – 15:00</a:t>
             </a:r>
             <a:endParaRPr lang="en-US" sz="1100" dirty="0"/>
           </a:p>
